--- a/docs/Quizzy-presentation.pptx
+++ b/docs/Quizzy-presentation.pptx
@@ -3921,7 +3921,7 @@
         <p:spPr>
           <a:xfrm>
             <a:off x="822960" y="1828800"/>
-            <a:ext cx="10424160" cy="1267014"/>
+            <a:ext cx="10424160" cy="841256"/>
           </a:xfrm>
           <a:prstGeom prst="rect">
             <a:avLst/>
@@ -3979,75 +3979,7 @@
               </a:rPr>
               <a:t>https://www.figma.com/design/tlruEwSnrdCRjzwTCqDJTX</a:t>
             </a:r>
-            <a:endParaRPr lang="ru-RU" dirty="0"/>
-          </a:p>
-          <a:p>
-            <a:pPr>
-              <a:spcAft>
-                <a:spcPts val="800"/>
-              </a:spcAft>
-              <a:defRPr sz="2100">
-                <a:solidFill>
-                  <a:srgbClr val="F5F7FF"/>
-                </a:solidFill>
-              </a:defRPr>
-            </a:pPr>
-            <a:r>
-              <a:rPr dirty="0" err="1"/>
-              <a:t>Пояснительная</a:t>
-            </a:r>
-            <a:r>
-              <a:rPr dirty="0"/>
-              <a:t> </a:t>
-            </a:r>
-            <a:r>
-              <a:rPr dirty="0" err="1"/>
-              <a:t>записка</a:t>
-            </a:r>
-            <a:r>
-              <a:rPr dirty="0"/>
-              <a:t> и </a:t>
-            </a:r>
-            <a:r>
-              <a:rPr dirty="0" err="1"/>
-              <a:t>данная</a:t>
-            </a:r>
-            <a:r>
-              <a:rPr dirty="0"/>
-              <a:t> </a:t>
-            </a:r>
-            <a:r>
-              <a:rPr dirty="0" err="1"/>
-              <a:t>презентация</a:t>
-            </a:r>
-            <a:r>
-              <a:rPr dirty="0"/>
-              <a:t> </a:t>
-            </a:r>
-            <a:r>
-              <a:rPr dirty="0" err="1"/>
-              <a:t>входят</a:t>
-            </a:r>
-            <a:r>
-              <a:rPr dirty="0"/>
-              <a:t> в </a:t>
-            </a:r>
-            <a:r>
-              <a:rPr dirty="0" err="1"/>
-              <a:t>комплект</a:t>
-            </a:r>
-            <a:r>
-              <a:rPr dirty="0"/>
-              <a:t> </a:t>
-            </a:r>
-            <a:r>
-              <a:rPr dirty="0" err="1"/>
-              <a:t>сдачи</a:t>
-            </a:r>
-            <a:r>
-              <a:rPr dirty="0"/>
-              <a:t>.</a:t>
-            </a:r>
+            <a:endParaRPr dirty="0"/>
           </a:p>
         </p:txBody>
       </p:sp>
@@ -4531,6 +4463,7 @@
               </a:defRPr>
             </a:pPr>
             <a:r>
+              <a:rPr dirty="0"/>
               <a:t>Frontend</a:t>
             </a:r>
           </a:p>
